--- a/docs/Review-III/QueryGenie_Review-III.pptx
+++ b/docs/Review-III/QueryGenie_Review-III.pptx
@@ -18,8 +18,9 @@
     <p:sldId id="275" r:id="rId7"/>
     <p:sldId id="267" r:id="rId8"/>
     <p:sldId id="268" r:id="rId9"/>
+    <p:sldId id="280" r:id="rId23"/>
     <p:sldId id="272" r:id="rId10"/>
-    <p:sldId id="280" r:id="rId23"/>
+    <p:sldId id="281" r:id="rId24"/>
     <p:sldId id="271" r:id="rId11"/>
     <p:sldId id="276" r:id="rId12"/>
     <p:sldId id="273" r:id="rId13"/>
@@ -4773,66 +4774,84 @@
           <a:p>
             <a:pPr/>
             <a:r>
-              <a:rPr b="1" sz="1700"/>
+              <a:rPr b="1" sz="1600"/>
               <a:t>Reproduced </a:t>
             </a:r>
             <a:r>
-              <a:rPr sz="1700"/>
+              <a:rPr sz="1600"/>
               <a:t>CodeS-1B: 77.8% vs 77.9% (−0.1 pts) on a free Colab T4, after auditing our own evaluation.</a:t>
             </a:r>
           </a:p>
           <a:p>
             <a:pPr/>
             <a:r>
-              <a:rPr b="1" sz="1700"/>
+              <a:rPr b="1" sz="1600"/>
               <a:t>Enhanced </a:t>
             </a:r>
             <a:r>
-              <a:rPr sz="1700"/>
+              <a:rPr sz="1600"/>
               <a:t>with confidence-aware abstention: 83.3% correct when answering, 32% fewer wrong answers, statistically significant.</a:t>
             </a:r>
           </a:p>
           <a:p>
             <a:pPr/>
             <a:r>
-              <a:rPr b="1" sz="1700"/>
+              <a:rPr b="1" sz="1600"/>
               <a:t>Delivered </a:t>
             </a:r>
             <a:r>
-              <a:rPr sz="1700"/>
+              <a:rPr sz="1600"/>
               <a:t>QueryGenie, a desktop app that runs locally and asks when it isn't sure.</a:t>
             </a:r>
           </a:p>
           <a:p>
             <a:pPr/>
             <a:r>
-              <a:rPr b="1" sz="1700"/>
-              <a:t>Future work:</a:t>
-            </a:r>
-            <a:r>
-              <a:rPr sz="1700"/>
-              <a:t/>
+              <a:rPr b="1" sz="1600"/>
+              <a:t>Future work — research:</a:t>
+            </a:r>
+            <a:r>
+              <a:rPr sz="1600"/>
+              <a:t> test-suite accuracy; CodeS-3B; a learned reranker (a correct query is among the 4 for 83.1% of questions); calibration on real-world data.</a:t>
+            </a:r>
+          </a:p>
+          <a:p>
+            <a:pPr/>
+            <a:r>
+              <a:rPr b="1" sz="1600"/>
+              <a:t>Future work — from app to platform</a:t>
+            </a:r>
+            <a:r>
+              <a:rPr sz="1600"/>
+              <a:t> (local, so no data leaves the company):</a:t>
             </a:r>
           </a:p>
           <a:p>
             <a:pPr lvl="1"/>
             <a:r>
-              <a:rPr sz="1500"/>
-              <a:t>Test-suite accuracy from the saved predictions; CodeS-3B</a:t>
+              <a:rPr sz="1400"/>
+              <a:t>Any database: SQL Server, Snowflake, Apache Spark; MongoDB and other NoSQL through a SQL gateway</a:t>
             </a:r>
           </a:p>
           <a:p>
             <a:pPr lvl="1"/>
             <a:r>
-              <a:rPr sz="1500"/>
-              <a:t>A learned reranker: a correct query is among the 4 for 83.1% of questions</a:t>
+              <a:rPr sz="1400"/>
+              <a:t>Per-database adaptation: value index per database; optional one-time fine-tuning (CodeS data augmentation)</a:t>
             </a:r>
           </a:p>
           <a:p>
             <a:pPr lvl="1"/>
             <a:r>
-              <a:rPr sz="1500"/>
-              <a:t>Calibrate the threshold on realistic and real-world data</a:t>
+              <a:rPr sz="1400"/>
+              <a:t>Access control: users and roles per database / table / column, with an audit log</a:t>
+            </a:r>
+          </a:p>
+          <a:p>
+            <a:pPr lvl="1"/>
+            <a:r>
+              <a:rPr sz="1400"/>
+              <a:t>Serving at scale: quantised larger models on laptops; a shared server for many users</a:t>
             </a:r>
           </a:p>
         </p:txBody>
@@ -7328,6 +7347,181 @@
 </file>
 
 <file path=ppt/slides/slide17.xml><?xml version="1.0" encoding="utf-8"?>
+<p:sld xmlns:a="http://schemas.openxmlformats.org/drawingml/2006/main" xmlns:p="http://schemas.openxmlformats.org/presentationml/2006/main" xmlns:r="http://schemas.openxmlformats.org/officeDocument/2006/relationships">
+  <p:cSld>
+    <p:spTree>
+      <p:nvGrpSpPr>
+        <p:cNvPr id="1" name=""/>
+        <p:cNvGrpSpPr/>
+        <p:nvPr/>
+      </p:nvGrpSpPr>
+      <p:grpSpPr/>
+      <p:sp>
+        <p:nvSpPr>
+          <p:cNvPr id="2" name="Title 1"/>
+          <p:cNvSpPr>
+            <a:spLocks noGrp="1"/>
+          </p:cNvSpPr>
+          <p:nvPr>
+            <p:ph type="title"/>
+          </p:nvPr>
+        </p:nvSpPr>
+        <p:spPr/>
+        <p:txBody>
+          <a:bodyPr/>
+          <a:lstStyle/>
+          <a:p>
+            <a:r>
+              <a:t>Proposed Methodology — the QueryGenie app</a:t>
+            </a:r>
+          </a:p>
+        </p:txBody>
+      </p:sp>
+      <p:pic>
+        <p:nvPicPr>
+          <p:cNvPr id="3" name="Picture 2" descr="app_answer.png"/>
+          <p:cNvPicPr>
+            <a:picLocks noChangeAspect="1"/>
+          </p:cNvPicPr>
+          <p:nvPr/>
+        </p:nvPicPr>
+        <p:blipFill>
+          <a:blip r:embed="rId2"/>
+          <a:stretch>
+            <a:fillRect/>
+          </a:stretch>
+        </p:blipFill>
+        <p:spPr>
+          <a:xfrm>
+            <a:off x="731520" y="1600200"/>
+            <a:ext cx="5349240" cy="3343275"/>
+          </a:xfrm>
+          <a:prstGeom prst="rect">
+            <a:avLst/>
+          </a:prstGeom>
+        </p:spPr>
+      </p:pic>
+      <p:sp>
+        <p:nvSpPr>
+          <p:cNvPr id="4" name="TextBox 3"/>
+          <p:cNvSpPr txBox="1"/>
+          <p:nvPr/>
+        </p:nvSpPr>
+        <p:spPr>
+          <a:xfrm>
+            <a:off x="731520" y="5016627"/>
+            <a:ext cx="5349240" cy="457200"/>
+          </a:xfrm>
+          <a:prstGeom prst="rect">
+            <a:avLst/>
+          </a:prstGeom>
+          <a:noFill/>
+        </p:spPr>
+        <p:txBody>
+          <a:bodyPr wrap="square">
+            <a:spAutoFit/>
+          </a:bodyPr>
+          <a:lstStyle/>
+          <a:p>
+            <a:r>
+              <a:rPr sz="1300"/>
+              <a:t>Confident answer: 4 of 4 queries agree → table, chart, SQL</a:t>
+            </a:r>
+          </a:p>
+        </p:txBody>
+      </p:sp>
+      <p:pic>
+        <p:nvPicPr>
+          <p:cNvPr id="5" name="Picture 4" descr="app_not_sure.png"/>
+          <p:cNvPicPr>
+            <a:picLocks noChangeAspect="1"/>
+          </p:cNvPicPr>
+          <p:nvPr/>
+        </p:nvPicPr>
+        <p:blipFill>
+          <a:blip r:embed="rId3"/>
+          <a:stretch>
+            <a:fillRect/>
+          </a:stretch>
+        </p:blipFill>
+        <p:spPr>
+          <a:xfrm>
+            <a:off x="6263640" y="1600200"/>
+            <a:ext cx="5349240" cy="3343275"/>
+          </a:xfrm>
+          <a:prstGeom prst="rect">
+            <a:avLst/>
+          </a:prstGeom>
+        </p:spPr>
+      </p:pic>
+      <p:sp>
+        <p:nvSpPr>
+          <p:cNvPr id="6" name="TextBox 5"/>
+          <p:cNvSpPr txBox="1"/>
+          <p:nvPr/>
+        </p:nvSpPr>
+        <p:spPr>
+          <a:xfrm>
+            <a:off x="6263640" y="5016627"/>
+            <a:ext cx="5349240" cy="457200"/>
+          </a:xfrm>
+          <a:prstGeom prst="rect">
+            <a:avLst/>
+          </a:prstGeom>
+          <a:noFill/>
+        </p:spPr>
+        <p:txBody>
+          <a:bodyPr wrap="square">
+            <a:spAutoFit/>
+          </a:bodyPr>
+          <a:lstStyle/>
+          <a:p>
+            <a:r>
+              <a:rPr sz="1300"/>
+              <a:t>Abstention: queries disagree → it asks which reading you meant</a:t>
+            </a:r>
+          </a:p>
+        </p:txBody>
+      </p:sp>
+      <p:sp>
+        <p:nvSpPr>
+          <p:cNvPr id="7" name="TextBox 6"/>
+          <p:cNvSpPr txBox="1"/>
+          <p:nvPr/>
+        </p:nvSpPr>
+        <p:spPr>
+          <a:xfrm>
+            <a:off x="731520" y="5532120"/>
+            <a:ext cx="10881360" cy="731520"/>
+          </a:xfrm>
+          <a:prstGeom prst="rect">
+            <a:avLst/>
+          </a:prstGeom>
+          <a:noFill/>
+        </p:spPr>
+        <p:txBody>
+          <a:bodyPr wrap="square">
+            <a:spAutoFit/>
+          </a:bodyPr>
+          <a:lstStyle/>
+          <a:p>
+            <a:pPr/>
+            <a:r>
+              <a:rPr sz="1300"/>
+              <a:t>Desktop app (macOS, Windows) · runs locally on open weights · chats, schema map, charts, self-correction · SQLite, PostgreSQL, MySQL · optional Ollama / cloud models</a:t>
+            </a:r>
+          </a:p>
+        </p:txBody>
+      </p:sp>
+    </p:spTree>
+  </p:cSld>
+  <p:clrMapOvr>
+    <a:masterClrMapping/>
+  </p:clrMapOvr>
+</p:sld>
+</file>
+
+<file path=ppt/slides/slide18.xml><?xml version="1.0" encoding="utf-8"?>
 <p:sld xmlns:a="http://schemas.openxmlformats.org/drawingml/2006/main" xmlns:p="http://schemas.openxmlformats.org/presentationml/2006/main" xmlns:r="http://schemas.openxmlformats.org/officeDocument/2006/relationships">
   <p:cSld>
     <p:spTree>

--- a/docs/Review-III/QueryGenie_Review-III.pptx
+++ b/docs/Review-III/QueryGenie_Review-III.pptx
@@ -4379,7 +4379,7 @@
                   <a:srgbClr val="0070C0"/>
                 </a:solidFill>
               </a:rPr>
-              <a:t>&lt;Associate/Assistant Professor&gt;</a:t>
+              <a:t>Associate Professor</a:t>
             </a:r>
           </a:p>
           <a:p>

--- a/docs/Review-III/QueryGenie_Review-III.pptx
+++ b/docs/Review-III/QueryGenie_Review-III.pptx
@@ -7942,7 +7942,7 @@
                     <a:p>
                       <a:r>
                         <a:rPr sz="1200" b="1"/>
-                        <a:t>EX</a:t>
+                        <a:t>EX (paper)</a:t>
                       </a:r>
                     </a:p>
                   </a:txBody>
@@ -7983,7 +7983,7 @@
                     <a:p>
                       <a:r>
                         <a:rPr sz="1200" b="0"/>
-                        <a:t>77.8%</a:t>
+                        <a:t>77.8% (77.9%)</a:t>
                       </a:r>
                     </a:p>
                   </a:txBody>
@@ -8024,7 +8024,7 @@
                     <a:p>
                       <a:r>
                         <a:rPr sz="1200" b="0"/>
-                        <a:t>TBD</a:t>
+                        <a:t>69.5% (70.9%)</a:t>
                       </a:r>
                     </a:p>
                   </a:txBody>
@@ -8037,7 +8037,7 @@
                     <a:p>
                       <a:r>
                         <a:rPr sz="1200" b="0"/>
-                        <a:t>TBD</a:t>
+                        <a:t>86.2% / 76.7%</a:t>
                       </a:r>
                     </a:p>
                   </a:txBody>

--- a/docs/Review-III/QueryGenie_Review-III.pptx
+++ b/docs/Review-III/QueryGenie_Review-III.pptx
@@ -4110,7 +4110,7 @@
             </a:pPr>
             <a:r>
               <a:rPr lang="en-US" sz="1800" b="1" dirty="0"/>
-              <a:t>Presented by</a:t>
+              <a:t>Presented by — Team 18</a:t>
             </a:r>
           </a:p>
           <a:p>
